--- a/Documentation/workflow_practice_session.pptx
+++ b/Documentation/workflow_practice_session.pptx
@@ -215,7 +215,7 @@
           <a:p>
             <a:fld id="{547D577E-1A90-4BD6-A2DF-B33E4CF0A857}" type="datetimeFigureOut">
               <a:rPr lang="en-GB" smtClean="0"/>
-              <a:t>16/11/2025</a:t>
+              <a:t>24/11/2025</a:t>
             </a:fld>
             <a:endParaRPr lang="en-GB"/>
           </a:p>
@@ -745,7 +745,7 @@
           <a:p>
             <a:fld id="{5BCAD085-E8A6-8845-BD4E-CB4CCA059FC4}" type="datetimeFigureOut">
               <a:rPr lang="en-US" smtClean="0"/>
-              <a:t>11/16/2025</a:t>
+              <a:t>11/24/2025</a:t>
             </a:fld>
             <a:endParaRPr lang="en-US"/>
           </a:p>
@@ -913,7 +913,7 @@
           <a:p>
             <a:fld id="{5BCAD085-E8A6-8845-BD4E-CB4CCA059FC4}" type="datetimeFigureOut">
               <a:rPr lang="en-US" smtClean="0"/>
-              <a:t>11/16/2025</a:t>
+              <a:t>11/24/2025</a:t>
             </a:fld>
             <a:endParaRPr lang="en-US"/>
           </a:p>
@@ -1091,7 +1091,7 @@
           <a:p>
             <a:fld id="{5BCAD085-E8A6-8845-BD4E-CB4CCA059FC4}" type="datetimeFigureOut">
               <a:rPr lang="en-US" smtClean="0"/>
-              <a:t>11/16/2025</a:t>
+              <a:t>11/24/2025</a:t>
             </a:fld>
             <a:endParaRPr lang="en-US"/>
           </a:p>
@@ -1259,7 +1259,7 @@
           <a:p>
             <a:fld id="{5BCAD085-E8A6-8845-BD4E-CB4CCA059FC4}" type="datetimeFigureOut">
               <a:rPr lang="en-US" smtClean="0"/>
-              <a:t>11/16/2025</a:t>
+              <a:t>11/24/2025</a:t>
             </a:fld>
             <a:endParaRPr lang="en-US"/>
           </a:p>
@@ -1504,7 +1504,7 @@
           <a:p>
             <a:fld id="{5BCAD085-E8A6-8845-BD4E-CB4CCA059FC4}" type="datetimeFigureOut">
               <a:rPr lang="en-US" smtClean="0"/>
-              <a:t>11/16/2025</a:t>
+              <a:t>11/24/2025</a:t>
             </a:fld>
             <a:endParaRPr lang="en-US"/>
           </a:p>
@@ -1789,7 +1789,7 @@
           <a:p>
             <a:fld id="{5BCAD085-E8A6-8845-BD4E-CB4CCA059FC4}" type="datetimeFigureOut">
               <a:rPr lang="en-US" smtClean="0"/>
-              <a:t>11/16/2025</a:t>
+              <a:t>11/24/2025</a:t>
             </a:fld>
             <a:endParaRPr lang="en-US"/>
           </a:p>
@@ -2208,7 +2208,7 @@
           <a:p>
             <a:fld id="{5BCAD085-E8A6-8845-BD4E-CB4CCA059FC4}" type="datetimeFigureOut">
               <a:rPr lang="en-US" smtClean="0"/>
-              <a:t>11/16/2025</a:t>
+              <a:t>11/24/2025</a:t>
             </a:fld>
             <a:endParaRPr lang="en-US"/>
           </a:p>
@@ -2325,7 +2325,7 @@
           <a:p>
             <a:fld id="{5BCAD085-E8A6-8845-BD4E-CB4CCA059FC4}" type="datetimeFigureOut">
               <a:rPr lang="en-US" smtClean="0"/>
-              <a:t>11/16/2025</a:t>
+              <a:t>11/24/2025</a:t>
             </a:fld>
             <a:endParaRPr lang="en-US"/>
           </a:p>
@@ -2420,7 +2420,7 @@
           <a:p>
             <a:fld id="{5BCAD085-E8A6-8845-BD4E-CB4CCA059FC4}" type="datetimeFigureOut">
               <a:rPr lang="en-US" smtClean="0"/>
-              <a:t>11/16/2025</a:t>
+              <a:t>11/24/2025</a:t>
             </a:fld>
             <a:endParaRPr lang="en-US"/>
           </a:p>
@@ -2695,7 +2695,7 @@
           <a:p>
             <a:fld id="{5BCAD085-E8A6-8845-BD4E-CB4CCA059FC4}" type="datetimeFigureOut">
               <a:rPr lang="en-US" smtClean="0"/>
-              <a:t>11/16/2025</a:t>
+              <a:t>11/24/2025</a:t>
             </a:fld>
             <a:endParaRPr lang="en-US"/>
           </a:p>
@@ -2947,7 +2947,7 @@
           <a:p>
             <a:fld id="{5BCAD085-E8A6-8845-BD4E-CB4CCA059FC4}" type="datetimeFigureOut">
               <a:rPr lang="en-US" smtClean="0"/>
-              <a:t>11/16/2025</a:t>
+              <a:t>11/24/2025</a:t>
             </a:fld>
             <a:endParaRPr lang="en-US"/>
           </a:p>
@@ -3158,7 +3158,7 @@
           <a:p>
             <a:fld id="{5BCAD085-E8A6-8845-BD4E-CB4CCA059FC4}" type="datetimeFigureOut">
               <a:rPr lang="en-US" smtClean="0"/>
-              <a:t>11/16/2025</a:t>
+              <a:t>11/24/2025</a:t>
             </a:fld>
             <a:endParaRPr lang="en-US"/>
           </a:p>
@@ -4229,7 +4229,7 @@
           <a:lstStyle/>
           <a:p>
             <a:r>
-              <a:rPr lang="en-GB" sz="1700">
+              <a:rPr lang="en-GB" sz="1700" dirty="0">
                 <a:solidFill>
                   <a:schemeClr val="tx1">
                     <a:alpha val="80000"/>
@@ -4241,7 +4241,7 @@
           </a:p>
           <a:p>
             <a:r>
-              <a:rPr lang="en-GB" sz="1700">
+              <a:rPr lang="en-GB" sz="1700" dirty="0">
                 <a:solidFill>
                   <a:schemeClr val="tx1">
                     <a:alpha val="80000"/>
@@ -4252,7 +4252,7 @@
             </a:r>
           </a:p>
           <a:p>
-            <a:endParaRPr lang="en-GB" sz="1700">
+            <a:endParaRPr lang="en-GB" sz="1700" dirty="0">
               <a:solidFill>
                 <a:schemeClr val="tx1">
                   <a:alpha val="80000"/>
@@ -4262,7 +4262,7 @@
           </a:p>
           <a:p>
             <a:r>
-              <a:rPr lang="en-GB" sz="1700">
+              <a:rPr lang="en-GB" sz="1700" dirty="0">
                 <a:solidFill>
                   <a:schemeClr val="tx1">
                     <a:alpha val="80000"/>
@@ -4274,7 +4274,7 @@
           </a:p>
           <a:p>
             <a:r>
-              <a:rPr lang="en-GB" sz="1700">
+              <a:rPr lang="en-GB" sz="1700" dirty="0">
                 <a:solidFill>
                   <a:schemeClr val="tx1">
                     <a:alpha val="80000"/>
@@ -4286,7 +4286,7 @@
           </a:p>
           <a:p>
             <a:r>
-              <a:rPr lang="en-GB" sz="1700">
+              <a:rPr lang="en-GB" sz="1700" dirty="0">
                 <a:solidFill>
                   <a:schemeClr val="tx1">
                     <a:alpha val="80000"/>
@@ -4298,7 +4298,19 @@
           </a:p>
           <a:p>
             <a:r>
-              <a:rPr lang="en-GB" sz="1700">
+              <a:rPr lang="en-GB" sz="1700" dirty="0">
+                <a:solidFill>
+                  <a:schemeClr val="tx1">
+                    <a:alpha val="80000"/>
+                  </a:schemeClr>
+                </a:solidFill>
+              </a:rPr>
+              <a:t>- Concept art to include some size definition</a:t>
+            </a:r>
+          </a:p>
+          <a:p>
+            <a:r>
+              <a:rPr lang="en-GB" sz="1700" dirty="0">
                 <a:solidFill>
                   <a:schemeClr val="tx1">
                     <a:alpha val="80000"/>
@@ -4310,7 +4322,7 @@
           </a:p>
           <a:p>
             <a:r>
-              <a:rPr lang="en-GB" sz="1700">
+              <a:rPr lang="en-GB" sz="1700" dirty="0">
                 <a:solidFill>
                   <a:schemeClr val="tx1">
                     <a:alpha val="80000"/>
@@ -4322,7 +4334,7 @@
           </a:p>
           <a:p>
             <a:r>
-              <a:rPr lang="en-GB" sz="1700">
+              <a:rPr lang="en-GB" sz="1700" dirty="0">
                 <a:solidFill>
                   <a:schemeClr val="tx1">
                     <a:alpha val="80000"/>
@@ -4334,7 +4346,7 @@
           </a:p>
           <a:p>
             <a:r>
-              <a:rPr lang="en-GB" sz="1700">
+              <a:rPr lang="en-GB" sz="1700" dirty="0">
                 <a:solidFill>
                   <a:schemeClr val="tx1">
                     <a:alpha val="80000"/>
@@ -4346,7 +4358,7 @@
           </a:p>
           <a:p>
             <a:r>
-              <a:rPr lang="en-GB" sz="1700">
+              <a:rPr lang="en-GB" sz="1700" dirty="0">
                 <a:solidFill>
                   <a:schemeClr val="tx1">
                     <a:alpha val="80000"/>
@@ -4358,7 +4370,7 @@
           </a:p>
           <a:p>
             <a:r>
-              <a:rPr lang="en-GB" sz="1700">
+              <a:rPr lang="en-GB" sz="1700" dirty="0">
                 <a:solidFill>
                   <a:schemeClr val="tx1">
                     <a:alpha val="80000"/>
@@ -4693,7 +4705,7 @@
               </a:lnSpc>
             </a:pPr>
             <a:r>
-              <a:rPr lang="en-US" sz="3500" kern="1200">
+              <a:rPr lang="en-US" sz="3500" kern="1200" dirty="0">
                 <a:solidFill>
                   <a:schemeClr val="tx1"/>
                 </a:solidFill>
@@ -4701,7 +4713,7 @@
                 <a:ea typeface="+mj-ea"/>
                 <a:cs typeface="+mj-cs"/>
               </a:rPr>
-              <a:t>Activity 1 – One-Handed Sword</a:t>
+              <a:t>Activity 1 – Bedroll</a:t>
             </a:r>
           </a:p>
         </p:txBody>
@@ -4736,8 +4748,8 @@
               <a:buChar char="•"/>
             </a:pPr>
             <a:r>
-              <a:rPr lang="en-US" sz="1700"/>
-              <a:t>Create a simple one-handed sword.</a:t>
+              <a:rPr lang="en-US" sz="1700" dirty="0"/>
+              <a:t>Create a simple bedroll.</a:t>
             </a:r>
           </a:p>
           <a:p>
@@ -4749,7 +4761,7 @@
               <a:buChar char="•"/>
             </a:pPr>
             <a:r>
-              <a:rPr lang="en-US" sz="1700"/>
+              <a:rPr lang="en-US" sz="1700" dirty="0"/>
               <a:t>Include scale reference.</a:t>
             </a:r>
           </a:p>
@@ -4762,8 +4774,12 @@
               <a:buChar char="•"/>
             </a:pPr>
             <a:r>
-              <a:rPr lang="en-US" sz="1700"/>
-              <a:t>Blockout expected.</a:t>
+              <a:rPr lang="en-US" sz="1700" dirty="0" err="1"/>
+              <a:t>Blockout</a:t>
+            </a:r>
+            <a:r>
+              <a:rPr lang="en-US" sz="1700" dirty="0"/>
+              <a:t> expected.</a:t>
             </a:r>
           </a:p>
           <a:p>
@@ -4774,7 +4790,7 @@
               <a:buFont typeface="Arial" panose="020B0604020202020204" pitchFamily="34" charset="0"/>
               <a:buChar char="•"/>
             </a:pPr>
-            <a:endParaRPr lang="en-US" sz="1700"/>
+            <a:endParaRPr lang="en-US" sz="1700" dirty="0"/>
           </a:p>
           <a:p>
             <a:pPr indent="-228600" defTabSz="914400">
@@ -4784,7 +4800,7 @@
               <a:buFont typeface="Arial" panose="020B0604020202020204" pitchFamily="34" charset="0"/>
               <a:buChar char="•"/>
             </a:pPr>
-            <a:endParaRPr lang="en-US" sz="1700"/>
+            <a:endParaRPr lang="en-US" sz="1700" dirty="0"/>
           </a:p>
         </p:txBody>
       </p:sp>
@@ -5144,7 +5160,7 @@
               </a:lnSpc>
             </a:pPr>
             <a:r>
-              <a:rPr lang="en-US" sz="3500" kern="1200">
+              <a:rPr lang="en-US" sz="3500" kern="1200" dirty="0">
                 <a:solidFill>
                   <a:schemeClr val="tx1"/>
                 </a:solidFill>
@@ -5152,8 +5168,20 @@
                 <a:ea typeface="+mj-ea"/>
                 <a:cs typeface="+mj-cs"/>
               </a:rPr>
-              <a:t>Activity 2 – One-Handed Axe</a:t>
-            </a:r>
+              <a:t>Activity 2 –</a:t>
+            </a:r>
+            <a:r>
+              <a:rPr lang="en-GB" dirty="0"/>
+              <a:t>Table</a:t>
+            </a:r>
+            <a:endParaRPr lang="en-US" sz="3500" kern="1200" dirty="0">
+              <a:solidFill>
+                <a:schemeClr val="tx1"/>
+              </a:solidFill>
+              <a:latin typeface="+mj-lt"/>
+              <a:ea typeface="+mj-ea"/>
+              <a:cs typeface="+mj-cs"/>
+            </a:endParaRPr>
           </a:p>
         </p:txBody>
       </p:sp>
@@ -5187,8 +5215,8 @@
               <a:buChar char="•"/>
             </a:pPr>
             <a:r>
-              <a:rPr lang="en-US" sz="1700"/>
-              <a:t>One-handed axe with oversized head.</a:t>
+              <a:rPr lang="en-US" sz="1700" dirty="0"/>
+              <a:t>Needs to be suitable for a camp</a:t>
             </a:r>
           </a:p>
           <a:p>
@@ -5199,10 +5227,7 @@
               <a:buFont typeface="Arial" panose="020B0604020202020204" pitchFamily="34" charset="0"/>
               <a:buChar char="•"/>
             </a:pPr>
-            <a:r>
-              <a:rPr lang="en-US" sz="1700"/>
-              <a:t>Exaggerated proportions.</a:t>
-            </a:r>
+            <a:endParaRPr lang="en-US" sz="1700" dirty="0"/>
           </a:p>
           <a:p>
             <a:pPr indent="-228600" defTabSz="914400">
@@ -5212,18 +5237,8 @@
               <a:buFont typeface="Arial" panose="020B0604020202020204" pitchFamily="34" charset="0"/>
               <a:buChar char="•"/>
             </a:pPr>
-            <a:endParaRPr lang="en-US" sz="1700"/>
-          </a:p>
-          <a:p>
-            <a:pPr indent="-228600" defTabSz="914400">
-              <a:lnSpc>
-                <a:spcPct val="90000"/>
-              </a:lnSpc>
-              <a:buFont typeface="Arial" panose="020B0604020202020204" pitchFamily="34" charset="0"/>
-              <a:buChar char="•"/>
-            </a:pPr>
-            <a:r>
-              <a:rPr lang="en-US" sz="1700"/>
+            <a:r>
+              <a:rPr lang="en-US" sz="1700" dirty="0"/>
               <a:t>Tutorial placeholders included.</a:t>
             </a:r>
           </a:p>
@@ -5598,7 +5613,7 @@
               </a:lnSpc>
             </a:pPr>
             <a:r>
-              <a:rPr lang="en-US" sz="3500" kern="1200">
+              <a:rPr lang="en-US" sz="3500" kern="1200" dirty="0">
                 <a:solidFill>
                   <a:schemeClr val="tx1"/>
                 </a:solidFill>
@@ -6101,7 +6116,7 @@
           <a:lstStyle/>
           <a:p>
             <a:r>
-              <a:rPr lang="en-GB" sz="1700">
+              <a:rPr lang="en-GB" sz="1700" dirty="0" err="1">
                 <a:solidFill>
                   <a:schemeClr val="tx1">
                     <a:lumMod val="65000"/>
@@ -6109,12 +6124,10 @@
                   </a:schemeClr>
                 </a:solidFill>
               </a:rPr>
-              <a:t>BigDan: Creature rig (flying allowed)</a:t>
-            </a:r>
-          </a:p>
-          <a:p>
-            <a:r>
-              <a:rPr lang="en-GB" sz="1700">
+              <a:t>BigDan</a:t>
+            </a:r>
+            <a:r>
+              <a:rPr lang="en-GB" sz="1700" dirty="0">
                 <a:solidFill>
                   <a:schemeClr val="tx1">
                     <a:lumMod val="65000"/>
@@ -6122,12 +6135,36 @@
                   </a:schemeClr>
                 </a:solidFill>
               </a:rPr>
-              <a:t>LittleDan: Slash/impact VFX</a:t>
-            </a:r>
-          </a:p>
-          <a:p>
-            <a:r>
-              <a:rPr lang="en-GB" sz="1700">
+              <a:t>: Creature rig (flying allowed)</a:t>
+            </a:r>
+          </a:p>
+          <a:p>
+            <a:r>
+              <a:rPr lang="en-GB" sz="1700" dirty="0" err="1">
+                <a:solidFill>
+                  <a:schemeClr val="tx1">
+                    <a:lumMod val="65000"/>
+                    <a:lumOff val="35000"/>
+                  </a:schemeClr>
+                </a:solidFill>
+              </a:rPr>
+              <a:t>LittleDan</a:t>
+            </a:r>
+            <a:r>
+              <a:rPr lang="en-GB" sz="1700" dirty="0">
+                <a:solidFill>
+                  <a:schemeClr val="tx1">
+                    <a:lumMod val="65000"/>
+                    <a:lumOff val="35000"/>
+                  </a:schemeClr>
+                </a:solidFill>
+              </a:rPr>
+              <a:t>: Slash/impact VFX</a:t>
+            </a:r>
+          </a:p>
+          <a:p>
+            <a:r>
+              <a:rPr lang="en-GB" sz="1700" dirty="0">
                 <a:solidFill>
                   <a:schemeClr val="tx1">
                     <a:lumMod val="65000"/>
@@ -6140,7 +6177,7 @@
           </a:p>
           <a:p>
             <a:r>
-              <a:rPr lang="en-GB" sz="1700">
+              <a:rPr lang="en-GB" sz="1700" dirty="0">
                 <a:solidFill>
                   <a:schemeClr val="tx1">
                     <a:lumMod val="65000"/>
@@ -6148,12 +6185,12 @@
                   </a:schemeClr>
                 </a:solidFill>
               </a:rPr>
-              <a:t>Steven: Warhammer + blend shape</a:t>
-            </a:r>
-          </a:p>
-          <a:p>
-            <a:r>
-              <a:rPr lang="en-GB" sz="1700">
+              <a:t>Steven: Make a non-character hero asset</a:t>
+            </a:r>
+          </a:p>
+          <a:p>
+            <a:r>
+              <a:rPr lang="en-GB" sz="1700" dirty="0">
                 <a:solidFill>
                   <a:schemeClr val="tx1">
                     <a:lumMod val="65000"/>
@@ -6161,12 +6198,31 @@
                   </a:schemeClr>
                 </a:solidFill>
               </a:rPr>
-              <a:t>Damien: Small creature blockout</a:t>
-            </a:r>
-          </a:p>
-          <a:p>
-            <a:r>
-              <a:rPr lang="en-GB" sz="1700">
+              <a:t>Damien: Small creature </a:t>
+            </a:r>
+            <a:r>
+              <a:rPr lang="en-GB" sz="1700" dirty="0" err="1">
+                <a:solidFill>
+                  <a:schemeClr val="tx1">
+                    <a:lumMod val="65000"/>
+                    <a:lumOff val="35000"/>
+                  </a:schemeClr>
+                </a:solidFill>
+              </a:rPr>
+              <a:t>blockout</a:t>
+            </a:r>
+            <a:endParaRPr lang="en-GB" sz="1700" dirty="0">
+              <a:solidFill>
+                <a:schemeClr val="tx1">
+                  <a:lumMod val="65000"/>
+                  <a:lumOff val="35000"/>
+                </a:schemeClr>
+              </a:solidFill>
+            </a:endParaRPr>
+          </a:p>
+          <a:p>
+            <a:r>
+              <a:rPr lang="en-GB" sz="1700" dirty="0">
                 <a:solidFill>
                   <a:schemeClr val="tx1">
                     <a:lumMod val="65000"/>
@@ -6179,7 +6235,7 @@
           </a:p>
           <a:p>
             <a:r>
-              <a:rPr lang="en-GB" sz="1700">
+              <a:rPr lang="en-GB" sz="1700" dirty="0">
                 <a:solidFill>
                   <a:schemeClr val="tx1">
                     <a:lumMod val="65000"/>
@@ -6489,7 +6545,7 @@
           <a:lstStyle/>
           <a:p>
             <a:r>
-              <a:rPr lang="en-GB" sz="1700">
+              <a:rPr lang="en-GB" sz="1700" dirty="0" err="1">
                 <a:solidFill>
                   <a:schemeClr val="tx1">
                     <a:lumMod val="65000"/>
@@ -6497,12 +6553,10 @@
                   </a:schemeClr>
                 </a:solidFill>
               </a:rPr>
-              <a:t>BigDan: Rig Damien’s Activity 4 model</a:t>
-            </a:r>
-          </a:p>
-          <a:p>
-            <a:r>
-              <a:rPr lang="en-GB" sz="1700">
+              <a:t>BigDan</a:t>
+            </a:r>
+            <a:r>
+              <a:rPr lang="en-GB" sz="1700" dirty="0">
                 <a:solidFill>
                   <a:schemeClr val="tx1">
                     <a:lumMod val="65000"/>
@@ -6510,12 +6564,36 @@
                   </a:schemeClr>
                 </a:solidFill>
               </a:rPr>
-              <a:t>LittleDan: Smoke puff VFX</a:t>
-            </a:r>
-          </a:p>
-          <a:p>
-            <a:r>
-              <a:rPr lang="en-GB" sz="1700">
+              <a:t>: Rig Damien’s Activity 4 model</a:t>
+            </a:r>
+          </a:p>
+          <a:p>
+            <a:r>
+              <a:rPr lang="en-GB" sz="1700" dirty="0" err="1">
+                <a:solidFill>
+                  <a:schemeClr val="tx1">
+                    <a:lumMod val="65000"/>
+                    <a:lumOff val="35000"/>
+                  </a:schemeClr>
+                </a:solidFill>
+              </a:rPr>
+              <a:t>LittleDan</a:t>
+            </a:r>
+            <a:r>
+              <a:rPr lang="en-GB" sz="1700" dirty="0">
+                <a:solidFill>
+                  <a:schemeClr val="tx1">
+                    <a:lumMod val="65000"/>
+                    <a:lumOff val="35000"/>
+                  </a:schemeClr>
+                </a:solidFill>
+              </a:rPr>
+              <a:t>: Smoke puff VFX</a:t>
+            </a:r>
+          </a:p>
+          <a:p>
+            <a:r>
+              <a:rPr lang="en-GB" sz="1700" dirty="0">
                 <a:solidFill>
                   <a:schemeClr val="tx1">
                     <a:lumMod val="65000"/>
@@ -6528,7 +6606,7 @@
           </a:p>
           <a:p>
             <a:r>
-              <a:rPr lang="en-GB" sz="1700">
+              <a:rPr lang="en-GB" sz="1700" dirty="0">
                 <a:solidFill>
                   <a:schemeClr val="tx1">
                     <a:lumMod val="65000"/>
@@ -6541,7 +6619,7 @@
           </a:p>
           <a:p>
             <a:r>
-              <a:rPr lang="en-GB" sz="1700">
+              <a:rPr lang="en-GB" sz="1700" dirty="0">
                 <a:solidFill>
                   <a:schemeClr val="tx1">
                     <a:lumMod val="65000"/>
@@ -6554,7 +6632,7 @@
           </a:p>
           <a:p>
             <a:r>
-              <a:rPr lang="en-GB" sz="1700">
+              <a:rPr lang="en-GB" sz="1700" dirty="0">
                 <a:solidFill>
                   <a:schemeClr val="tx1">
                     <a:lumMod val="65000"/>
@@ -6567,7 +6645,7 @@
           </a:p>
           <a:p>
             <a:r>
-              <a:rPr lang="en-GB" sz="1700">
+              <a:rPr lang="en-GB" sz="1700" dirty="0">
                 <a:solidFill>
                   <a:schemeClr val="tx1">
                     <a:lumMod val="65000"/>
@@ -6877,7 +6955,7 @@
           <a:lstStyle/>
           <a:p>
             <a:r>
-              <a:rPr lang="en-GB" sz="1700">
+              <a:rPr lang="en-GB" sz="1700" dirty="0" err="1">
                 <a:solidFill>
                   <a:schemeClr val="tx1">
                     <a:lumMod val="65000"/>
@@ -6885,12 +6963,10 @@
                   </a:schemeClr>
                 </a:solidFill>
               </a:rPr>
-              <a:t>BigDan: One skeleton → two models</a:t>
-            </a:r>
-          </a:p>
-          <a:p>
-            <a:r>
-              <a:rPr lang="en-GB" sz="1700">
+              <a:t>BigDan</a:t>
+            </a:r>
+            <a:r>
+              <a:rPr lang="en-GB" sz="1700" dirty="0">
                 <a:solidFill>
                   <a:schemeClr val="tx1">
                     <a:lumMod val="65000"/>
@@ -6898,12 +6974,58 @@
                   </a:schemeClr>
                 </a:solidFill>
               </a:rPr>
-              <a:t>LittleDan: Fire VFX with variable color/height</a:t>
-            </a:r>
-          </a:p>
-          <a:p>
-            <a:r>
-              <a:rPr lang="en-GB" sz="1700">
+              <a:t>: One skeleton → two models</a:t>
+            </a:r>
+          </a:p>
+          <a:p>
+            <a:r>
+              <a:rPr lang="en-GB" sz="1700" dirty="0" err="1">
+                <a:solidFill>
+                  <a:schemeClr val="tx1">
+                    <a:lumMod val="65000"/>
+                    <a:lumOff val="35000"/>
+                  </a:schemeClr>
+                </a:solidFill>
+              </a:rPr>
+              <a:t>LittleDan</a:t>
+            </a:r>
+            <a:r>
+              <a:rPr lang="en-GB" sz="1700" dirty="0">
+                <a:solidFill>
+                  <a:schemeClr val="tx1">
+                    <a:lumMod val="65000"/>
+                    <a:lumOff val="35000"/>
+                  </a:schemeClr>
+                </a:solidFill>
+              </a:rPr>
+              <a:t>: Fire VFX with variable </a:t>
+            </a:r>
+            <a:r>
+              <a:rPr lang="en-GB" sz="1700" dirty="0" err="1">
+                <a:solidFill>
+                  <a:schemeClr val="tx1">
+                    <a:lumMod val="65000"/>
+                    <a:lumOff val="35000"/>
+                  </a:schemeClr>
+                </a:solidFill>
+              </a:rPr>
+              <a:t>color</a:t>
+            </a:r>
+            <a:r>
+              <a:rPr lang="en-GB" sz="1700" dirty="0">
+                <a:solidFill>
+                  <a:schemeClr val="tx1">
+                    <a:lumMod val="65000"/>
+                    <a:lumOff val="35000"/>
+                  </a:schemeClr>
+                </a:solidFill>
+              </a:rPr>
+              <a:t>/height</a:t>
+            </a:r>
+          </a:p>
+          <a:p>
+            <a:r>
+              <a:rPr lang="en-GB" sz="1700" dirty="0">
                 <a:solidFill>
                   <a:schemeClr val="tx1">
                     <a:lumMod val="65000"/>
@@ -6916,7 +7038,7 @@
           </a:p>
           <a:p>
             <a:r>
-              <a:rPr lang="en-GB" sz="1700">
+              <a:rPr lang="en-GB" sz="1700" dirty="0">
                 <a:solidFill>
                   <a:schemeClr val="tx1">
                     <a:lumMod val="65000"/>
@@ -6924,12 +7046,12 @@
                   </a:schemeClr>
                 </a:solidFill>
               </a:rPr>
-              <a:t>Steven: Extend earlier weapon</a:t>
-            </a:r>
-          </a:p>
-          <a:p>
-            <a:r>
-              <a:rPr lang="en-GB" sz="1700">
+              <a:t>Steven: Extend earlier asset</a:t>
+            </a:r>
+          </a:p>
+          <a:p>
+            <a:r>
+              <a:rPr lang="en-GB" sz="1700" dirty="0">
                 <a:solidFill>
                   <a:schemeClr val="tx1">
                     <a:lumMod val="65000"/>
@@ -6942,7 +7064,7 @@
           </a:p>
           <a:p>
             <a:r>
-              <a:rPr lang="en-GB" sz="1700">
+              <a:rPr lang="en-GB" sz="1700" dirty="0">
                 <a:solidFill>
                   <a:schemeClr val="tx1">
                     <a:lumMod val="65000"/>
@@ -6955,7 +7077,7 @@
           </a:p>
           <a:p>
             <a:r>
-              <a:rPr lang="en-GB" sz="1700">
+              <a:rPr lang="en-GB" sz="1700" dirty="0">
                 <a:solidFill>
                   <a:schemeClr val="tx1">
                     <a:lumMod val="65000"/>
